--- a/topics/gradient-descent/課外主題_梯度下降法.pptx
+++ b/topics/gradient-descent/課外主題_梯度下降法.pptx
@@ -3943,7 +3943,7 @@
                 </a:solidFill>
                 <a:latin typeface="Consolas"/>
               </a:rPr>
-              <a:t>opt = tf.keras.optimizers.legacy.SGD(0.1)</a:t>
+              <a:t>eta = 0.1</a:t>
             </a:r>
           </a:p>
           <a:p>
@@ -4015,7 +4015,7 @@
                 </a:solidFill>
                 <a:latin typeface="Consolas"/>
               </a:rPr>
-              <a:t>    opt.apply_gradients([(g, w)])</a:t>
+              <a:t>    w.assign_sub(eta * g)       # 就是更新式</a:t>
             </a:r>
           </a:p>
         </p:txBody>
